--- a/Day05-API-Fundamentals-and-FastAPI-Core/Day05_Deck_API_Fundamentals_and_FastAPI_Core.pptx
+++ b/Day05-API-Fundamentals-and-FastAPI-Core/Day05_Deck_API_Fundamentals_and_FastAPI_Core.pptx
@@ -6599,13 +6599,13 @@
           <a:noFill/>
         </p:spPr>
         <p:txBody>
-          <a:bodyPr wrap="square" lIns="0" rIns="0" tIns="0" bIns="0" anchor="t">
-            <a:spAutoFit/>
-          </a:bodyPr>
-          <a:lstStyle/>
-          <a:p>
-            <a:r>
-              <a:rPr sz="1378" b="0" i="0">
+          <a:bodyPr wrap="none" lIns="0" rIns="0" tIns="0" bIns="0" anchor="t">
+            <a:spAutoFit/>
+          </a:bodyPr>
+          <a:lstStyle/>
+          <a:p>
+            <a:r>
+              <a:rPr sz="1212" b="0" i="0">
                 <a:solidFill>
                   <a:srgbClr val="EAF7F5"/>
                 </a:solidFill>
@@ -6616,7 +6616,7 @@
           </a:p>
           <a:p>
             <a:r>
-              <a:rPr sz="1378" b="0" i="0">
+              <a:rPr sz="1212" b="0" i="0">
                 <a:solidFill>
                   <a:srgbClr val="EAF7F5"/>
                 </a:solidFill>
@@ -6627,7 +6627,7 @@
           </a:p>
           <a:p>
             <a:r>
-              <a:rPr sz="1378" b="0" i="0">
+              <a:rPr sz="1212" b="0" i="0">
                 <a:solidFill>
                   <a:srgbClr val="EAF7F5"/>
                 </a:solidFill>
@@ -6638,7 +6638,7 @@
           </a:p>
           <a:p>
             <a:r>
-              <a:rPr sz="1378" b="0" i="0">
+              <a:rPr sz="1212" b="0" i="0">
                 <a:solidFill>
                   <a:srgbClr val="EAF7F5"/>
                 </a:solidFill>
@@ -6649,7 +6649,7 @@
           </a:p>
           <a:p>
             <a:r>
-              <a:rPr sz="1378" b="0" i="0">
+              <a:rPr sz="1212" b="0" i="0">
                 <a:solidFill>
                   <a:srgbClr val="EAF7F5"/>
                 </a:solidFill>
@@ -6660,7 +6660,7 @@
           </a:p>
           <a:p>
             <a:r>
-              <a:rPr sz="1378" b="0" i="0">
+              <a:rPr sz="1212" b="0" i="0">
                 <a:solidFill>
                   <a:srgbClr val="EAF7F5"/>
                 </a:solidFill>
@@ -6671,7 +6671,7 @@
           </a:p>
           <a:p>
             <a:r>
-              <a:rPr sz="1378" b="0" i="0">
+              <a:rPr sz="1212" b="0" i="0">
                 <a:solidFill>
                   <a:srgbClr val="EAF7F5"/>
                 </a:solidFill>
@@ -6682,7 +6682,7 @@
           </a:p>
           <a:p>
             <a:r>
-              <a:rPr sz="1378" b="0" i="0">
+              <a:rPr sz="1212" b="0" i="0">
                 <a:solidFill>
                   <a:srgbClr val="EAF7F5"/>
                 </a:solidFill>
@@ -6693,7 +6693,7 @@
           </a:p>
           <a:p>
             <a:r>
-              <a:rPr sz="1378" b="0" i="0">
+              <a:rPr sz="1212" b="0" i="0">
                 <a:solidFill>
                   <a:srgbClr val="EAF7F5"/>
                 </a:solidFill>
@@ -6704,7 +6704,7 @@
           </a:p>
           <a:p>
             <a:r>
-              <a:rPr sz="1378" b="0" i="0">
+              <a:rPr sz="1212" b="0" i="0">
                 <a:solidFill>
                   <a:srgbClr val="EAF7F5"/>
                 </a:solidFill>
@@ -6715,7 +6715,7 @@
           </a:p>
           <a:p>
             <a:r>
-              <a:rPr sz="1378" b="0" i="0">
+              <a:rPr sz="1212" b="0" i="0">
                 <a:solidFill>
                   <a:srgbClr val="EAF7F5"/>
                 </a:solidFill>
@@ -7554,13 +7554,13 @@
           <a:noFill/>
         </p:spPr>
         <p:txBody>
-          <a:bodyPr wrap="square" lIns="0" rIns="0" tIns="0" bIns="0" anchor="t">
-            <a:spAutoFit/>
-          </a:bodyPr>
-          <a:lstStyle/>
-          <a:p>
-            <a:r>
-              <a:rPr sz="1133" b="0" i="0">
+          <a:bodyPr wrap="none" lIns="0" rIns="0" tIns="0" bIns="0" anchor="t">
+            <a:spAutoFit/>
+          </a:bodyPr>
+          <a:lstStyle/>
+          <a:p>
+            <a:r>
+              <a:rPr sz="997" b="0" i="0">
                 <a:solidFill>
                   <a:srgbClr val="EAF7F5"/>
                 </a:solidFill>
@@ -7571,7 +7571,7 @@
           </a:p>
           <a:p>
             <a:r>
-              <a:rPr sz="1133" b="0" i="0">
+              <a:rPr sz="997" b="0" i="0">
                 <a:solidFill>
                   <a:srgbClr val="EAF7F5"/>
                 </a:solidFill>
@@ -7582,7 +7582,7 @@
           </a:p>
           <a:p>
             <a:r>
-              <a:rPr sz="1133" b="0" i="0">
+              <a:rPr sz="997" b="0" i="0">
                 <a:solidFill>
                   <a:srgbClr val="EAF7F5"/>
                 </a:solidFill>
@@ -7593,7 +7593,7 @@
           </a:p>
           <a:p>
             <a:r>
-              <a:rPr sz="1133" b="0" i="0">
+              <a:rPr sz="997" b="0" i="0">
                 <a:solidFill>
                   <a:srgbClr val="EAF7F5"/>
                 </a:solidFill>
@@ -7604,7 +7604,7 @@
           </a:p>
           <a:p>
             <a:r>
-              <a:rPr sz="1133" b="0" i="0">
+              <a:rPr sz="997" b="0" i="0">
                 <a:solidFill>
                   <a:srgbClr val="EAF7F5"/>
                 </a:solidFill>
@@ -7615,7 +7615,7 @@
           </a:p>
           <a:p>
             <a:r>
-              <a:rPr sz="1133" b="0" i="0">
+              <a:rPr sz="997" b="0" i="0">
                 <a:solidFill>
                   <a:srgbClr val="EAF7F5"/>
                 </a:solidFill>
@@ -7626,7 +7626,7 @@
           </a:p>
           <a:p>
             <a:r>
-              <a:rPr sz="1133" b="0" i="0">
+              <a:rPr sz="997" b="0" i="0">
                 <a:solidFill>
                   <a:srgbClr val="EAF7F5"/>
                 </a:solidFill>
@@ -7637,7 +7637,7 @@
           </a:p>
           <a:p>
             <a:r>
-              <a:rPr sz="1133" b="0" i="0">
+              <a:rPr sz="997" b="0" i="0">
                 <a:solidFill>
                   <a:srgbClr val="EAF7F5"/>
                 </a:solidFill>
@@ -7648,7 +7648,7 @@
           </a:p>
           <a:p>
             <a:r>
-              <a:rPr sz="1133" b="0" i="0">
+              <a:rPr sz="997" b="0" i="0">
                 <a:solidFill>
                   <a:srgbClr val="EAF7F5"/>
                 </a:solidFill>
@@ -7659,7 +7659,7 @@
           </a:p>
           <a:p>
             <a:r>
-              <a:rPr sz="1133" b="0" i="0">
+              <a:rPr sz="997" b="0" i="0">
                 <a:solidFill>
                   <a:srgbClr val="EAF7F5"/>
                 </a:solidFill>
@@ -7670,7 +7670,7 @@
           </a:p>
           <a:p>
             <a:r>
-              <a:rPr sz="1133" b="0" i="0">
+              <a:rPr sz="997" b="0" i="0">
                 <a:solidFill>
                   <a:srgbClr val="EAF7F5"/>
                 </a:solidFill>
@@ -7681,7 +7681,7 @@
           </a:p>
           <a:p>
             <a:r>
-              <a:rPr sz="1133" b="0" i="0">
+              <a:rPr sz="997" b="0" i="0">
                 <a:solidFill>
                   <a:srgbClr val="EAF7F5"/>
                 </a:solidFill>
@@ -7969,13 +7969,13 @@
           <a:noFill/>
         </p:spPr>
         <p:txBody>
-          <a:bodyPr wrap="square" lIns="0" rIns="0" tIns="0" bIns="0" anchor="t">
-            <a:spAutoFit/>
-          </a:bodyPr>
-          <a:lstStyle/>
-          <a:p>
-            <a:r>
-              <a:rPr sz="962" b="0" i="0">
+          <a:bodyPr wrap="none" lIns="0" rIns="0" tIns="0" bIns="0" anchor="t">
+            <a:spAutoFit/>
+          </a:bodyPr>
+          <a:lstStyle/>
+          <a:p>
+            <a:r>
+              <a:rPr sz="846" b="0" i="0">
                 <a:solidFill>
                   <a:srgbClr val="EAF7F5"/>
                 </a:solidFill>
@@ -7986,7 +7986,7 @@
           </a:p>
           <a:p>
             <a:r>
-              <a:rPr sz="962" b="0" i="0">
+              <a:rPr sz="846" b="0" i="0">
                 <a:solidFill>
                   <a:srgbClr val="EAF7F5"/>
                 </a:solidFill>
@@ -7997,7 +7997,7 @@
           </a:p>
           <a:p>
             <a:r>
-              <a:rPr sz="962" b="0" i="0">
+              <a:rPr sz="846" b="0" i="0">
                 <a:solidFill>
                   <a:srgbClr val="EAF7F5"/>
                 </a:solidFill>
@@ -8008,7 +8008,7 @@
           </a:p>
           <a:p>
             <a:r>
-              <a:rPr sz="962" b="0" i="0">
+              <a:rPr sz="846" b="0" i="0">
                 <a:solidFill>
                   <a:srgbClr val="EAF7F5"/>
                 </a:solidFill>
@@ -8019,7 +8019,7 @@
           </a:p>
           <a:p>
             <a:r>
-              <a:rPr sz="962" b="0" i="0">
+              <a:rPr sz="846" b="0" i="0">
                 <a:solidFill>
                   <a:srgbClr val="EAF7F5"/>
                 </a:solidFill>
@@ -8030,7 +8030,7 @@
           </a:p>
           <a:p>
             <a:r>
-              <a:rPr sz="962" b="0" i="0">
+              <a:rPr sz="846" b="0" i="0">
                 <a:solidFill>
                   <a:srgbClr val="EAF7F5"/>
                 </a:solidFill>
@@ -8041,7 +8041,7 @@
           </a:p>
           <a:p>
             <a:r>
-              <a:rPr sz="962" b="0" i="0">
+              <a:rPr sz="846" b="0" i="0">
                 <a:solidFill>
                   <a:srgbClr val="EAF7F5"/>
                 </a:solidFill>
@@ -8052,7 +8052,7 @@
           </a:p>
           <a:p>
             <a:r>
-              <a:rPr sz="962" b="0" i="0">
+              <a:rPr sz="846" b="0" i="0">
                 <a:solidFill>
                   <a:srgbClr val="EAF7F5"/>
                 </a:solidFill>
@@ -8063,7 +8063,7 @@
           </a:p>
           <a:p>
             <a:r>
-              <a:rPr sz="962" b="0" i="0">
+              <a:rPr sz="846" b="0" i="0">
                 <a:solidFill>
                   <a:srgbClr val="EAF7F5"/>
                 </a:solidFill>
@@ -8074,7 +8074,7 @@
           </a:p>
           <a:p>
             <a:r>
-              <a:rPr sz="962" b="0" i="0">
+              <a:rPr sz="846" b="0" i="0">
                 <a:solidFill>
                   <a:srgbClr val="EAF7F5"/>
                 </a:solidFill>
@@ -8085,7 +8085,7 @@
           </a:p>
           <a:p>
             <a:r>
-              <a:rPr sz="962" b="0" i="0">
+              <a:rPr sz="846" b="0" i="0">
                 <a:solidFill>
                   <a:srgbClr val="EAF7F5"/>
                 </a:solidFill>
@@ -8096,7 +8096,7 @@
           </a:p>
           <a:p>
             <a:r>
-              <a:rPr sz="962" b="0" i="0">
+              <a:rPr sz="846" b="0" i="0">
                 <a:solidFill>
                   <a:srgbClr val="EAF7F5"/>
                 </a:solidFill>
@@ -10249,13 +10249,13 @@
           <a:noFill/>
         </p:spPr>
         <p:txBody>
-          <a:bodyPr wrap="square" lIns="0" rIns="0" tIns="0" bIns="0" anchor="t">
-            <a:spAutoFit/>
-          </a:bodyPr>
-          <a:lstStyle/>
-          <a:p>
-            <a:r>
-              <a:rPr sz="927" b="0" i="0">
+          <a:bodyPr wrap="none" lIns="0" rIns="0" tIns="0" bIns="0" anchor="t">
+            <a:spAutoFit/>
+          </a:bodyPr>
+          <a:lstStyle/>
+          <a:p>
+            <a:r>
+              <a:rPr sz="816" b="0" i="0">
                 <a:solidFill>
                   <a:srgbClr val="EAF7F5"/>
                 </a:solidFill>
@@ -10266,7 +10266,7 @@
           </a:p>
           <a:p>
             <a:r>
-              <a:rPr sz="927" b="0" i="0">
+              <a:rPr sz="816" b="0" i="0">
                 <a:solidFill>
                   <a:srgbClr val="EAF7F5"/>
                 </a:solidFill>
@@ -10277,7 +10277,7 @@
           </a:p>
           <a:p>
             <a:r>
-              <a:rPr sz="927" b="0" i="0">
+              <a:rPr sz="816" b="0" i="0">
                 <a:solidFill>
                   <a:srgbClr val="EAF7F5"/>
                 </a:solidFill>
@@ -10288,7 +10288,7 @@
           </a:p>
           <a:p>
             <a:r>
-              <a:rPr sz="927" b="0" i="0">
+              <a:rPr sz="816" b="0" i="0">
                 <a:solidFill>
                   <a:srgbClr val="EAF7F5"/>
                 </a:solidFill>
@@ -10299,7 +10299,7 @@
           </a:p>
           <a:p>
             <a:r>
-              <a:rPr sz="927" b="0" i="0">
+              <a:rPr sz="816" b="0" i="0">
                 <a:solidFill>
                   <a:srgbClr val="EAF7F5"/>
                 </a:solidFill>
@@ -10310,7 +10310,7 @@
           </a:p>
           <a:p>
             <a:r>
-              <a:rPr sz="927" b="0" i="0">
+              <a:rPr sz="816" b="0" i="0">
                 <a:solidFill>
                   <a:srgbClr val="EAF7F5"/>
                 </a:solidFill>
@@ -10321,7 +10321,7 @@
           </a:p>
           <a:p>
             <a:r>
-              <a:rPr sz="927" b="0" i="0">
+              <a:rPr sz="816" b="0" i="0">
                 <a:solidFill>
                   <a:srgbClr val="EAF7F5"/>
                 </a:solidFill>
@@ -10332,7 +10332,7 @@
           </a:p>
           <a:p>
             <a:r>
-              <a:rPr sz="927" b="0" i="0">
+              <a:rPr sz="816" b="0" i="0">
                 <a:solidFill>
                   <a:srgbClr val="EAF7F5"/>
                 </a:solidFill>
@@ -10343,7 +10343,7 @@
           </a:p>
           <a:p>
             <a:r>
-              <a:rPr sz="927" b="0" i="0">
+              <a:rPr sz="816" b="0" i="0">
                 <a:solidFill>
                   <a:srgbClr val="EAF7F5"/>
                 </a:solidFill>
@@ -10354,7 +10354,7 @@
           </a:p>
           <a:p>
             <a:r>
-              <a:rPr sz="927" b="0" i="0">
+              <a:rPr sz="816" b="0" i="0">
                 <a:solidFill>
                   <a:srgbClr val="EAF7F5"/>
                 </a:solidFill>
@@ -10365,7 +10365,7 @@
           </a:p>
           <a:p>
             <a:r>
-              <a:rPr sz="927" b="0" i="0">
+              <a:rPr sz="816" b="0" i="0">
                 <a:solidFill>
                   <a:srgbClr val="EAF7F5"/>
                 </a:solidFill>
@@ -10376,7 +10376,7 @@
           </a:p>
           <a:p>
             <a:r>
-              <a:rPr sz="927" b="0" i="0">
+              <a:rPr sz="816" b="0" i="0">
                 <a:solidFill>
                   <a:srgbClr val="EAF7F5"/>
                 </a:solidFill>
@@ -10387,7 +10387,7 @@
           </a:p>
           <a:p>
             <a:r>
-              <a:rPr sz="927" b="0" i="0">
+              <a:rPr sz="816" b="0" i="0">
                 <a:solidFill>
                   <a:srgbClr val="EAF7F5"/>
                 </a:solidFill>
@@ -10398,7 +10398,7 @@
           </a:p>
           <a:p>
             <a:r>
-              <a:rPr sz="927" b="0" i="0">
+              <a:rPr sz="816" b="0" i="0">
                 <a:solidFill>
                   <a:srgbClr val="EAF7F5"/>
                 </a:solidFill>
@@ -10409,7 +10409,7 @@
           </a:p>
           <a:p>
             <a:r>
-              <a:rPr sz="927" b="0" i="0">
+              <a:rPr sz="816" b="0" i="0">
                 <a:solidFill>
                   <a:srgbClr val="EAF7F5"/>
                 </a:solidFill>
@@ -10420,7 +10420,7 @@
           </a:p>
           <a:p>
             <a:r>
-              <a:rPr sz="927" b="0" i="0">
+              <a:rPr sz="816" b="0" i="0">
                 <a:solidFill>
                   <a:srgbClr val="EAF7F5"/>
                 </a:solidFill>
@@ -12176,13 +12176,13 @@
           <a:noFill/>
         </p:spPr>
         <p:txBody>
-          <a:bodyPr wrap="square" lIns="0" rIns="0" tIns="0" bIns="0" anchor="t">
-            <a:spAutoFit/>
-          </a:bodyPr>
-          <a:lstStyle/>
-          <a:p>
-            <a:r>
-              <a:rPr sz="1019" b="0" i="0">
+          <a:bodyPr wrap="none" lIns="0" rIns="0" tIns="0" bIns="0" anchor="t">
+            <a:spAutoFit/>
+          </a:bodyPr>
+          <a:lstStyle/>
+          <a:p>
+            <a:r>
+              <a:rPr sz="897" b="0" i="0">
                 <a:solidFill>
                   <a:srgbClr val="EAF7F5"/>
                 </a:solidFill>
@@ -12193,7 +12193,7 @@
           </a:p>
           <a:p>
             <a:r>
-              <a:rPr sz="1019" b="0" i="0">
+              <a:rPr sz="897" b="0" i="0">
                 <a:solidFill>
                   <a:srgbClr val="EAF7F5"/>
                 </a:solidFill>
@@ -12204,7 +12204,7 @@
           </a:p>
           <a:p>
             <a:r>
-              <a:rPr sz="1019" b="0" i="0">
+              <a:rPr sz="897" b="0" i="0">
                 <a:solidFill>
                   <a:srgbClr val="EAF7F5"/>
                 </a:solidFill>
@@ -12215,7 +12215,7 @@
           </a:p>
           <a:p>
             <a:r>
-              <a:rPr sz="1019" b="0" i="0">
+              <a:rPr sz="897" b="0" i="0">
                 <a:solidFill>
                   <a:srgbClr val="EAF7F5"/>
                 </a:solidFill>
@@ -12226,7 +12226,7 @@
           </a:p>
           <a:p>
             <a:r>
-              <a:rPr sz="1019" b="0" i="0">
+              <a:rPr sz="897" b="0" i="0">
                 <a:solidFill>
                   <a:srgbClr val="EAF7F5"/>
                 </a:solidFill>
@@ -12237,7 +12237,7 @@
           </a:p>
           <a:p>
             <a:r>
-              <a:rPr sz="1019" b="0" i="0">
+              <a:rPr sz="897" b="0" i="0">
                 <a:solidFill>
                   <a:srgbClr val="EAF7F5"/>
                 </a:solidFill>
@@ -12248,7 +12248,7 @@
           </a:p>
           <a:p>
             <a:r>
-              <a:rPr sz="1019" b="0" i="0">
+              <a:rPr sz="897" b="0" i="0">
                 <a:solidFill>
                   <a:srgbClr val="EAF7F5"/>
                 </a:solidFill>
@@ -12259,7 +12259,7 @@
           </a:p>
           <a:p>
             <a:r>
-              <a:rPr sz="1019" b="0" i="0">
+              <a:rPr sz="897" b="0" i="0">
                 <a:solidFill>
                   <a:srgbClr val="EAF7F5"/>
                 </a:solidFill>
@@ -12270,7 +12270,7 @@
           </a:p>
           <a:p>
             <a:r>
-              <a:rPr sz="1019" b="0" i="0">
+              <a:rPr sz="897" b="0" i="0">
                 <a:solidFill>
                   <a:srgbClr val="EAF7F5"/>
                 </a:solidFill>
@@ -12281,7 +12281,7 @@
           </a:p>
           <a:p>
             <a:r>
-              <a:rPr sz="1019" b="0" i="0">
+              <a:rPr sz="897" b="0" i="0">
                 <a:solidFill>
                   <a:srgbClr val="EAF7F5"/>
                 </a:solidFill>
@@ -12292,7 +12292,7 @@
           </a:p>
           <a:p>
             <a:r>
-              <a:rPr sz="1019" b="0" i="0">
+              <a:rPr sz="897" b="0" i="0">
                 <a:solidFill>
                   <a:srgbClr val="EAF7F5"/>
                 </a:solidFill>
@@ -14162,13 +14162,13 @@
           <a:noFill/>
         </p:spPr>
         <p:txBody>
-          <a:bodyPr wrap="square" lIns="0" rIns="0" tIns="0" bIns="0" anchor="t">
-            <a:spAutoFit/>
-          </a:bodyPr>
-          <a:lstStyle/>
-          <a:p>
-            <a:r>
-              <a:rPr sz="1306" b="0" i="0">
+          <a:bodyPr wrap="none" lIns="0" rIns="0" tIns="0" bIns="0" anchor="t">
+            <a:spAutoFit/>
+          </a:bodyPr>
+          <a:lstStyle/>
+          <a:p>
+            <a:r>
+              <a:rPr sz="1149" b="0" i="0">
                 <a:solidFill>
                   <a:srgbClr val="EAF7F5"/>
                 </a:solidFill>
@@ -14179,7 +14179,7 @@
           </a:p>
           <a:p>
             <a:r>
-              <a:rPr sz="1306" b="0" i="0">
+              <a:rPr sz="1149" b="0" i="0">
                 <a:solidFill>
                   <a:srgbClr val="EAF7F5"/>
                 </a:solidFill>
@@ -14190,7 +14190,7 @@
           </a:p>
           <a:p>
             <a:r>
-              <a:rPr sz="1306" b="0" i="0">
+              <a:rPr sz="1149" b="0" i="0">
                 <a:solidFill>
                   <a:srgbClr val="EAF7F5"/>
                 </a:solidFill>
@@ -14201,7 +14201,7 @@
           </a:p>
           <a:p>
             <a:r>
-              <a:rPr sz="1306" b="0" i="0">
+              <a:rPr sz="1149" b="0" i="0">
                 <a:solidFill>
                   <a:srgbClr val="EAF7F5"/>
                 </a:solidFill>
@@ -14212,7 +14212,7 @@
           </a:p>
           <a:p>
             <a:r>
-              <a:rPr sz="1306" b="0" i="0">
+              <a:rPr sz="1149" b="0" i="0">
                 <a:solidFill>
                   <a:srgbClr val="EAF7F5"/>
                 </a:solidFill>
@@ -14223,7 +14223,7 @@
           </a:p>
           <a:p>
             <a:r>
-              <a:rPr sz="1306" b="0" i="0">
+              <a:rPr sz="1149" b="0" i="0">
                 <a:solidFill>
                   <a:srgbClr val="EAF7F5"/>
                 </a:solidFill>
@@ -21872,13 +21872,13 @@
           <a:noFill/>
         </p:spPr>
         <p:txBody>
-          <a:bodyPr wrap="square" lIns="0" rIns="0" tIns="0" bIns="0" anchor="t">
-            <a:spAutoFit/>
-          </a:bodyPr>
-          <a:lstStyle/>
-          <a:p>
-            <a:r>
-              <a:rPr sz="1378" b="0" i="0">
+          <a:bodyPr wrap="none" lIns="0" rIns="0" tIns="0" bIns="0" anchor="t">
+            <a:spAutoFit/>
+          </a:bodyPr>
+          <a:lstStyle/>
+          <a:p>
+            <a:r>
+              <a:rPr sz="1212" b="0" i="0">
                 <a:solidFill>
                   <a:srgbClr val="EAF7F5"/>
                 </a:solidFill>
@@ -21889,7 +21889,7 @@
           </a:p>
           <a:p>
             <a:r>
-              <a:rPr sz="1378" b="0" i="0">
+              <a:rPr sz="1212" b="0" i="0">
                 <a:solidFill>
                   <a:srgbClr val="EAF7F5"/>
                 </a:solidFill>
@@ -21900,7 +21900,7 @@
           </a:p>
           <a:p>
             <a:r>
-              <a:rPr sz="1378" b="0" i="0">
+              <a:rPr sz="1212" b="0" i="0">
                 <a:solidFill>
                   <a:srgbClr val="EAF7F5"/>
                 </a:solidFill>
@@ -21911,7 +21911,7 @@
           </a:p>
           <a:p>
             <a:r>
-              <a:rPr sz="1378" b="0" i="0">
+              <a:rPr sz="1212" b="0" i="0">
                 <a:solidFill>
                   <a:srgbClr val="EAF7F5"/>
                 </a:solidFill>
@@ -21922,7 +21922,7 @@
           </a:p>
           <a:p>
             <a:r>
-              <a:rPr sz="1378" b="0" i="0">
+              <a:rPr sz="1212" b="0" i="0">
                 <a:solidFill>
                   <a:srgbClr val="EAF7F5"/>
                 </a:solidFill>
@@ -21933,7 +21933,7 @@
           </a:p>
           <a:p>
             <a:r>
-              <a:rPr sz="1378" b="0" i="0">
+              <a:rPr sz="1212" b="0" i="0">
                 <a:solidFill>
                   <a:srgbClr val="EAF7F5"/>
                 </a:solidFill>
@@ -21944,7 +21944,7 @@
           </a:p>
           <a:p>
             <a:r>
-              <a:rPr sz="1378" b="0" i="0">
+              <a:rPr sz="1212" b="0" i="0">
                 <a:solidFill>
                   <a:srgbClr val="EAF7F5"/>
                 </a:solidFill>
@@ -21955,7 +21955,7 @@
           </a:p>
           <a:p>
             <a:r>
-              <a:rPr sz="1378" b="0" i="0">
+              <a:rPr sz="1212" b="0" i="0">
                 <a:solidFill>
                   <a:srgbClr val="EAF7F5"/>
                 </a:solidFill>
@@ -21966,7 +21966,7 @@
           </a:p>
           <a:p>
             <a:r>
-              <a:rPr sz="1378" b="0" i="0">
+              <a:rPr sz="1212" b="0" i="0">
                 <a:solidFill>
                   <a:srgbClr val="EAF7F5"/>
                 </a:solidFill>
@@ -21977,7 +21977,7 @@
           </a:p>
           <a:p>
             <a:r>
-              <a:rPr sz="1378" b="0" i="0">
+              <a:rPr sz="1212" b="0" i="0">
                 <a:solidFill>
                   <a:srgbClr val="EAF7F5"/>
                 </a:solidFill>
